--- a/dist/초5/수학/도형과측정/초5_수학_도형과측정_03_선대칭과점대칭.pptx
+++ b/dist/초5/수학/도형과측정/초5_수학_도형과측정_03_선대칭과점대칭.pptx
@@ -121,13 +121,13 @@
   <p:extLst>
     <p:ext uri="{521415D9-36F7-43E2-AB2F-B90AF26B5E84}">
       <p14:sectionLst xmlns:p14="http://schemas.microsoft.com/office/powerpoint/2010/main">
-        <p14:section name="도입" id="{bd89aa16-270b-9467-54a4-240acd24508f}">
+        <p14:section name="도입" id="{7e368af2-5ce2-75d1-0002-c2a013329cb0}">
           <p14:sldIdLst>
             <p14:sldId id="256"/>
             <p14:sldId id="257"/>
           </p14:sldIdLst>
         </p14:section>
-        <p14:section name="개념" id="{69e5966f-d6bd-f412-3662-5b8bccd65fc5}">
+        <p14:section name="개념" id="{c623f534-a5cd-84a1-5aaa-2963c3a93b96}">
           <p14:sldIdLst>
             <p14:sldId id="258"/>
             <p14:sldId id="259"/>
@@ -136,38 +136,38 @@
             <p14:sldId id="264"/>
           </p14:sldIdLst>
         </p14:section>
-        <p14:section name="연습" id="{451857ef-50bb-9727-cb23-e5a1ad64969b}">
+        <p14:section name="연습" id="{e20662cd-6fc6-e025-da71-5902c376e825}">
           <p14:sldIdLst>
             <p14:sldId id="260"/>
             <p14:sldId id="262"/>
             <p14:sldId id="265"/>
           </p14:sldIdLst>
         </p14:section>
-        <p14:section name="개념" id="{cd1ab9dd-e032-de51-df07-0e3878acd985}">
+        <p14:section name="개념" id="{d90a76f4-f428-3ec1-b0a3-32c3322f7354}">
           <p14:sldIdLst/>
         </p14:section>
-        <p14:section name="연습" id="{17ba2c43-30d6-0fe7-bad7-6a2900f2f890}">
+        <p14:section name="연습" id="{8594d48e-d49b-9ce5-e916-c42a1dc773c4}">
           <p14:sldIdLst/>
         </p14:section>
-        <p14:section name="개념" id="{7922034a-1db1-9858-b4ff-3240d8282380}">
+        <p14:section name="개념" id="{c089ef62-7b93-95b7-1b20-7266724c2ff3}">
           <p14:sldIdLst/>
         </p14:section>
-        <p14:section name="연습" id="{4b7cb2a7-810e-bb12-4027-3b65c50efda4}">
+        <p14:section name="연습" id="{78ec1b39-301b-d661-da6f-4f78aea9e463}">
           <p14:sldIdLst/>
         </p14:section>
-        <p14:section name="확인" id="{8581118c-69cc-a58f-4ae4-fc76eb054188}">
+        <p14:section name="확인" id="{5a628c20-e3c3-3b2c-f083-83dcf30b63c1}">
           <p14:sldIdLst>
             <p14:sldId id="266"/>
             <p14:sldId id="267"/>
             <p14:sldId id="268"/>
           </p14:sldIdLst>
         </p14:section>
-        <p14:section name="정리" id="{c468381a-2a54-5833-1d03-d8d5a6dc8dfc}">
+        <p14:section name="정리" id="{aba3e7ec-5ae6-2aef-6d1d-4f8cb44c6bb9}">
           <p14:sldIdLst>
             <p14:sldId id="269"/>
           </p14:sldIdLst>
         </p14:section>
-        <p14:section name="보충" id="{151d8b0b-fc8f-e261-3c0c-e540f8451e09}">
+        <p14:section name="보충" id="{841fc624-d748-287c-77dc-776eead82a9a}">
           <p14:sldIdLst>
             <p14:sldId id="270"/>
           </p14:sldIdLst>
@@ -4768,7 +4768,7 @@
         </p:nvSpPr>
         <p:spPr>
           <a:xfrm>
-            <a:off x="1451102" y="3434207"/>
+            <a:off x="1384046" y="3434207"/>
             <a:ext cx="483108" cy="476250"/>
           </a:xfrm>
           <a:prstGeom prst="rect">
@@ -5528,7 +5528,7 @@
         </p:nvSpPr>
         <p:spPr>
           <a:xfrm>
-            <a:off x="7322630" y="3434207"/>
+            <a:off x="7255574" y="3434207"/>
             <a:ext cx="483108" cy="476250"/>
           </a:xfrm>
           <a:prstGeom prst="rect">
@@ -5567,7 +5567,7 @@
         </p:nvSpPr>
         <p:spPr>
           <a:xfrm>
-            <a:off x="8540179" y="3326384"/>
+            <a:off x="8540179" y="3393440"/>
             <a:ext cx="483108" cy="476250"/>
           </a:xfrm>
           <a:prstGeom prst="rect">
@@ -8106,7 +8106,7 @@
         </p:nvSpPr>
         <p:spPr>
           <a:xfrm>
-            <a:off x="2254529" y="1529189"/>
+            <a:off x="2236630" y="1464567"/>
             <a:ext cx="483108" cy="476250"/>
           </a:xfrm>
           <a:prstGeom prst="rect">
@@ -8145,7 +8145,7 @@
         </p:nvSpPr>
         <p:spPr>
           <a:xfrm>
-            <a:off x="1680814" y="3710956"/>
+            <a:off x="1627960" y="3752223"/>
             <a:ext cx="483108" cy="476250"/>
           </a:xfrm>
           <a:prstGeom prst="rect">
@@ -8184,7 +8184,7 @@
         </p:nvSpPr>
         <p:spPr>
           <a:xfrm>
-            <a:off x="4349500" y="3658936"/>
+            <a:off x="4411451" y="3684598"/>
             <a:ext cx="483108" cy="476250"/>
           </a:xfrm>
           <a:prstGeom prst="rect">
@@ -8442,7 +8442,7 @@
         </p:nvSpPr>
         <p:spPr>
           <a:xfrm>
-            <a:off x="9451315" y="1529189"/>
+            <a:off x="9469214" y="1464567"/>
             <a:ext cx="483108" cy="476250"/>
           </a:xfrm>
           <a:prstGeom prst="rect">
@@ -8481,7 +8481,7 @@
         </p:nvSpPr>
         <p:spPr>
           <a:xfrm>
-            <a:off x="10025030" y="3710956"/>
+            <a:off x="10077884" y="3752223"/>
             <a:ext cx="483108" cy="476250"/>
           </a:xfrm>
           <a:prstGeom prst="rect">
@@ -8520,7 +8520,7 @@
         </p:nvSpPr>
         <p:spPr>
           <a:xfrm>
-            <a:off x="7356344" y="3658936"/>
+            <a:off x="7294393" y="3684598"/>
             <a:ext cx="483108" cy="476250"/>
           </a:xfrm>
           <a:prstGeom prst="rect">
@@ -9306,7 +9306,7 @@
         </p:nvSpPr>
         <p:spPr>
           <a:xfrm>
-            <a:off x="8717280" y="3757295"/>
+            <a:off x="8717280" y="3824351"/>
             <a:ext cx="483108" cy="476250"/>
           </a:xfrm>
           <a:prstGeom prst="rect">
@@ -10306,8 +10306,8 @@
         </p:nvSpPr>
         <p:spPr>
           <a:xfrm>
-            <a:off x="1447038" y="2286000"/>
-            <a:ext cx="3566160" cy="2971800"/>
+            <a:off x="1562688" y="2382375"/>
+            <a:ext cx="3334860" cy="2779050"/>
           </a:xfrm>
           <a:custGeom>
             <a:avLst/>
@@ -10316,21 +10316,21 @@
             <a:cxnLst/>
             <a:rect l="l" t="t" r="r" b="b"/>
             <a:pathLst>
-              <a:path w="3566160" h="2971800">
+              <a:path w="3334860" h="2779050">
                 <a:moveTo>
-                  <a:pt x="1783080" y="0"/>
+                  <a:pt x="1667430" y="0"/>
                 </a:moveTo>
                 <a:lnTo>
-                  <a:pt x="0" y="1188720"/>
-                </a:lnTo>
-                <a:lnTo>
-                  <a:pt x="594360" y="2971800"/>
-                </a:lnTo>
-                <a:lnTo>
-                  <a:pt x="2971800" y="2971800"/>
-                </a:lnTo>
-                <a:lnTo>
-                  <a:pt x="3566160" y="1188720"/>
+                  <a:pt x="0" y="1111620"/>
+                </a:lnTo>
+                <a:lnTo>
+                  <a:pt x="555810" y="2779050"/>
+                </a:lnTo>
+                <a:lnTo>
+                  <a:pt x="2779050" y="2779050"/>
+                </a:lnTo>
+                <a:lnTo>
+                  <a:pt x="3334860" y="1111620"/>
                 </a:lnTo>
                 <a:close/>
               </a:path>
@@ -10355,7 +10355,7 @@
         </p:nvSpPr>
         <p:spPr>
           <a:xfrm>
-            <a:off x="1926538" y="4894587"/>
+            <a:off x="2003638" y="4798212"/>
             <a:ext cx="478080" cy="363213"/>
           </a:xfrm>
           <a:custGeom>
@@ -10462,7 +10462,7 @@
         </p:nvSpPr>
         <p:spPr>
           <a:xfrm>
-            <a:off x="4055618" y="4894587"/>
+            <a:off x="3978518" y="4798212"/>
             <a:ext cx="478080" cy="363213"/>
           </a:xfrm>
           <a:custGeom>
@@ -10569,7 +10569,7 @@
         </p:nvSpPr>
         <p:spPr>
           <a:xfrm>
-            <a:off x="3230118" y="3265170"/>
+            <a:off x="3230118" y="3284445"/>
             <a:ext cx="209550" cy="209550"/>
           </a:xfrm>
           <a:custGeom>
@@ -10609,8 +10609,8 @@
         </p:nvSpPr>
         <p:spPr>
           <a:xfrm flipV="1">
-            <a:off x="3230118" y="1691640"/>
-            <a:ext cx="0" cy="4160520"/>
+            <a:off x="3230118" y="1826565"/>
+            <a:ext cx="0" cy="3890670"/>
           </a:xfrm>
           <a:prstGeom prst="line">
             <a:avLst/>
@@ -10632,8 +10632,8 @@
         </p:nvSpPr>
         <p:spPr>
           <a:xfrm>
-            <a:off x="1447038" y="3474720"/>
-            <a:ext cx="1783080" cy="0"/>
+            <a:off x="1562688" y="3493995"/>
+            <a:ext cx="1667430" cy="0"/>
           </a:xfrm>
           <a:prstGeom prst="line">
             <a:avLst/>
@@ -10655,8 +10655,8 @@
         </p:nvSpPr>
         <p:spPr>
           <a:xfrm>
-            <a:off x="3230118" y="3474720"/>
-            <a:ext cx="1783080" cy="0"/>
+            <a:off x="3230118" y="3493995"/>
+            <a:ext cx="1667430" cy="0"/>
           </a:xfrm>
           <a:prstGeom prst="line">
             <a:avLst/>
@@ -10678,7 +10678,7 @@
         </p:nvSpPr>
         <p:spPr>
           <a:xfrm>
-            <a:off x="2324630" y="2788920"/>
+            <a:off x="2382454" y="2846745"/>
             <a:ext cx="92990" cy="139485"/>
           </a:xfrm>
           <a:prstGeom prst="line">
@@ -10701,7 +10701,7 @@
         </p:nvSpPr>
         <p:spPr>
           <a:xfrm>
-            <a:off x="2259537" y="2832315"/>
+            <a:off x="2317361" y="2890140"/>
             <a:ext cx="92990" cy="139485"/>
           </a:xfrm>
           <a:prstGeom prst="line">
@@ -10724,7 +10724,7 @@
         </p:nvSpPr>
         <p:spPr>
           <a:xfrm flipV="1">
-            <a:off x="1664699" y="4339754"/>
+            <a:off x="1761074" y="4301204"/>
             <a:ext cx="159037" cy="53012"/>
           </a:xfrm>
           <a:prstGeom prst="line">
@@ -10747,7 +10747,7 @@
         </p:nvSpPr>
         <p:spPr>
           <a:xfrm flipH="1" flipV="1">
-            <a:off x="4636499" y="4339754"/>
+            <a:off x="4540125" y="4301204"/>
             <a:ext cx="159037" cy="53012"/>
           </a:xfrm>
           <a:prstGeom prst="line">
@@ -10770,7 +10770,7 @@
         </p:nvSpPr>
         <p:spPr>
           <a:xfrm flipH="1">
-            <a:off x="4107710" y="2832315"/>
+            <a:off x="4049885" y="2890140"/>
             <a:ext cx="92990" cy="139485"/>
           </a:xfrm>
           <a:prstGeom prst="line">
@@ -10793,7 +10793,7 @@
         </p:nvSpPr>
         <p:spPr>
           <a:xfrm flipH="1">
-            <a:off x="4042617" y="2788920"/>
+            <a:off x="3984792" y="2846745"/>
             <a:ext cx="92990" cy="139485"/>
           </a:xfrm>
           <a:prstGeom prst="line">
@@ -10816,7 +10816,7 @@
         </p:nvSpPr>
         <p:spPr>
           <a:xfrm>
-            <a:off x="1956816" y="3551555"/>
+            <a:off x="2014641" y="3570830"/>
             <a:ext cx="763524" cy="349250"/>
           </a:xfrm>
           <a:prstGeom prst="rect">
@@ -10855,7 +10855,7 @@
         </p:nvSpPr>
         <p:spPr>
           <a:xfrm>
-            <a:off x="3739896" y="3551555"/>
+            <a:off x="3682071" y="3570830"/>
             <a:ext cx="763524" cy="349250"/>
           </a:xfrm>
           <a:prstGeom prst="rect">
@@ -10894,7 +10894,7 @@
         </p:nvSpPr>
         <p:spPr>
           <a:xfrm>
-            <a:off x="3146617" y="1889822"/>
+            <a:off x="3194032" y="1938782"/>
             <a:ext cx="483108" cy="476250"/>
           </a:xfrm>
           <a:prstGeom prst="rect">
@@ -10933,7 +10933,7 @@
         </p:nvSpPr>
         <p:spPr>
           <a:xfrm>
-            <a:off x="985631" y="3196275"/>
+            <a:off x="1035324" y="3203454"/>
             <a:ext cx="483108" cy="476250"/>
           </a:xfrm>
           <a:prstGeom prst="rect">
@@ -10972,7 +10972,7 @@
         </p:nvSpPr>
         <p:spPr>
           <a:xfrm>
-            <a:off x="1669150" y="5201004"/>
+            <a:off x="1707041" y="5159028"/>
             <a:ext cx="483108" cy="476250"/>
           </a:xfrm>
           <a:prstGeom prst="rect">
@@ -11011,7 +11011,7 @@
         </p:nvSpPr>
         <p:spPr>
           <a:xfrm>
-            <a:off x="4307978" y="5201004"/>
+            <a:off x="4270087" y="5159028"/>
             <a:ext cx="483108" cy="476250"/>
           </a:xfrm>
           <a:prstGeom prst="rect">
@@ -11050,7 +11050,7 @@
         </p:nvSpPr>
         <p:spPr>
           <a:xfrm>
-            <a:off x="4991497" y="3196275"/>
+            <a:off x="4941804" y="3203454"/>
             <a:ext cx="483108" cy="476250"/>
           </a:xfrm>
           <a:prstGeom prst="rect">
@@ -11089,7 +11089,7 @@
         </p:nvSpPr>
         <p:spPr>
           <a:xfrm>
-            <a:off x="2830511" y="3078542"/>
+            <a:off x="2783096" y="3050402"/>
             <a:ext cx="483108" cy="476250"/>
           </a:xfrm>
           <a:prstGeom prst="rect">
@@ -12009,8 +12009,8 @@
         </p:nvSpPr>
         <p:spPr>
           <a:xfrm flipV="1">
-            <a:off x="7310445" y="1687068"/>
-            <a:ext cx="0" cy="3072384"/>
+            <a:off x="7357471" y="1728216"/>
+            <a:ext cx="0" cy="2990088"/>
           </a:xfrm>
           <a:prstGeom prst="line">
             <a:avLst/>
@@ -12032,8 +12032,8 @@
         </p:nvSpPr>
         <p:spPr>
           <a:xfrm flipV="1">
-            <a:off x="7749357" y="1687068"/>
-            <a:ext cx="0" cy="3072384"/>
+            <a:off x="7784627" y="1728216"/>
+            <a:ext cx="0" cy="2990088"/>
           </a:xfrm>
           <a:prstGeom prst="line">
             <a:avLst/>
@@ -12055,8 +12055,8 @@
         </p:nvSpPr>
         <p:spPr>
           <a:xfrm flipV="1">
-            <a:off x="8188269" y="1687068"/>
-            <a:ext cx="0" cy="3072384"/>
+            <a:off x="8211782" y="1728216"/>
+            <a:ext cx="0" cy="2990088"/>
           </a:xfrm>
           <a:prstGeom prst="line">
             <a:avLst/>
@@ -12078,8 +12078,8 @@
         </p:nvSpPr>
         <p:spPr>
           <a:xfrm flipV="1">
-            <a:off x="8627181" y="1687068"/>
-            <a:ext cx="0" cy="3072384"/>
+            <a:off x="8638938" y="1728216"/>
+            <a:ext cx="0" cy="2990088"/>
           </a:xfrm>
           <a:prstGeom prst="line">
             <a:avLst/>
@@ -12101,8 +12101,8 @@
         </p:nvSpPr>
         <p:spPr>
           <a:xfrm flipV="1">
-            <a:off x="9066093" y="1687068"/>
-            <a:ext cx="0" cy="3072384"/>
+            <a:off x="9066093" y="1728216"/>
+            <a:ext cx="0" cy="2990088"/>
           </a:xfrm>
           <a:prstGeom prst="line">
             <a:avLst/>
@@ -12124,8 +12124,8 @@
         </p:nvSpPr>
         <p:spPr>
           <a:xfrm flipV="1">
-            <a:off x="9505005" y="1687068"/>
-            <a:ext cx="0" cy="3072384"/>
+            <a:off x="9493249" y="1728216"/>
+            <a:ext cx="0" cy="2990088"/>
           </a:xfrm>
           <a:prstGeom prst="line">
             <a:avLst/>
@@ -12147,8 +12147,8 @@
         </p:nvSpPr>
         <p:spPr>
           <a:xfrm flipV="1">
-            <a:off x="9943917" y="1687068"/>
-            <a:ext cx="0" cy="3072384"/>
+            <a:off x="9920404" y="1728216"/>
+            <a:ext cx="0" cy="2990088"/>
           </a:xfrm>
           <a:prstGeom prst="line">
             <a:avLst/>
@@ -12170,8 +12170,8 @@
         </p:nvSpPr>
         <p:spPr>
           <a:xfrm flipV="1">
-            <a:off x="10382829" y="1687068"/>
-            <a:ext cx="0" cy="3072384"/>
+            <a:off x="10347559" y="1728216"/>
+            <a:ext cx="0" cy="2990088"/>
           </a:xfrm>
           <a:prstGeom prst="line">
             <a:avLst/>
@@ -12193,8 +12193,8 @@
         </p:nvSpPr>
         <p:spPr>
           <a:xfrm flipV="1">
-            <a:off x="10821741" y="1687068"/>
-            <a:ext cx="0" cy="3072384"/>
+            <a:off x="10774715" y="1728216"/>
+            <a:ext cx="0" cy="2990088"/>
           </a:xfrm>
           <a:prstGeom prst="line">
             <a:avLst/>
@@ -12216,8 +12216,8 @@
         </p:nvSpPr>
         <p:spPr>
           <a:xfrm>
-            <a:off x="7310445" y="4759452"/>
-            <a:ext cx="3511296" cy="0"/>
+            <a:off x="7357471" y="4718304"/>
+            <a:ext cx="3417243" cy="0"/>
           </a:xfrm>
           <a:prstGeom prst="line">
             <a:avLst/>
@@ -12239,8 +12239,8 @@
         </p:nvSpPr>
         <p:spPr>
           <a:xfrm>
-            <a:off x="7310445" y="4320540"/>
-            <a:ext cx="3511296" cy="0"/>
+            <a:off x="7357471" y="4291149"/>
+            <a:ext cx="3417243" cy="0"/>
           </a:xfrm>
           <a:prstGeom prst="line">
             <a:avLst/>
@@ -12262,8 +12262,8 @@
         </p:nvSpPr>
         <p:spPr>
           <a:xfrm>
-            <a:off x="7310445" y="3881628"/>
-            <a:ext cx="3511296" cy="0"/>
+            <a:off x="7357471" y="3863993"/>
+            <a:ext cx="3417243" cy="0"/>
           </a:xfrm>
           <a:prstGeom prst="line">
             <a:avLst/>
@@ -12285,8 +12285,8 @@
         </p:nvSpPr>
         <p:spPr>
           <a:xfrm>
-            <a:off x="7310445" y="3442716"/>
-            <a:ext cx="3511296" cy="0"/>
+            <a:off x="7357471" y="3436838"/>
+            <a:ext cx="3417243" cy="0"/>
           </a:xfrm>
           <a:prstGeom prst="line">
             <a:avLst/>
@@ -12308,8 +12308,8 @@
         </p:nvSpPr>
         <p:spPr>
           <a:xfrm>
-            <a:off x="7310445" y="3003804"/>
-            <a:ext cx="3511296" cy="0"/>
+            <a:off x="7357471" y="3009682"/>
+            <a:ext cx="3417243" cy="0"/>
           </a:xfrm>
           <a:prstGeom prst="line">
             <a:avLst/>
@@ -12331,8 +12331,8 @@
         </p:nvSpPr>
         <p:spPr>
           <a:xfrm>
-            <a:off x="7310445" y="2564892"/>
-            <a:ext cx="3511296" cy="0"/>
+            <a:off x="7357471" y="2582527"/>
+            <a:ext cx="3417243" cy="0"/>
           </a:xfrm>
           <a:prstGeom prst="line">
             <a:avLst/>
@@ -12354,8 +12354,8 @@
         </p:nvSpPr>
         <p:spPr>
           <a:xfrm>
-            <a:off x="7310445" y="2125980"/>
-            <a:ext cx="3511296" cy="0"/>
+            <a:off x="7357471" y="2155371"/>
+            <a:ext cx="3417243" cy="0"/>
           </a:xfrm>
           <a:prstGeom prst="line">
             <a:avLst/>
@@ -12377,8 +12377,8 @@
         </p:nvSpPr>
         <p:spPr>
           <a:xfrm>
-            <a:off x="7310445" y="1687068"/>
-            <a:ext cx="3511296" cy="0"/>
+            <a:off x="7357471" y="1728216"/>
+            <a:ext cx="3417243" cy="0"/>
           </a:xfrm>
           <a:prstGeom prst="line">
             <a:avLst/>
@@ -12400,8 +12400,8 @@
         </p:nvSpPr>
         <p:spPr>
           <a:xfrm>
-            <a:off x="7749357" y="2125980"/>
-            <a:ext cx="1316736" cy="2194560"/>
+            <a:off x="7784627" y="2155371"/>
+            <a:ext cx="1281466" cy="2135777"/>
           </a:xfrm>
           <a:custGeom>
             <a:avLst/>
@@ -12410,24 +12410,24 @@
             <a:cxnLst/>
             <a:rect l="l" t="t" r="r" b="b"/>
             <a:pathLst>
-              <a:path w="1316736" h="2194560">
+              <a:path w="1281466" h="2135777">
                 <a:moveTo>
-                  <a:pt x="1316736" y="0"/>
+                  <a:pt x="1281466" y="0"/>
                 </a:moveTo>
                 <a:lnTo>
-                  <a:pt x="438912" y="0"/>
-                </a:lnTo>
-                <a:lnTo>
-                  <a:pt x="877824" y="877824"/>
-                </a:lnTo>
-                <a:lnTo>
-                  <a:pt x="0" y="1755648"/>
-                </a:lnTo>
-                <a:lnTo>
-                  <a:pt x="877824" y="2194560"/>
-                </a:lnTo>
-                <a:lnTo>
-                  <a:pt x="1316736" y="2194560"/>
+                  <a:pt x="427155" y="0"/>
+                </a:lnTo>
+                <a:lnTo>
+                  <a:pt x="854311" y="854311"/>
+                </a:lnTo>
+                <a:lnTo>
+                  <a:pt x="0" y="1708622"/>
+                </a:lnTo>
+                <a:lnTo>
+                  <a:pt x="854311" y="2135777"/>
+                </a:lnTo>
+                <a:lnTo>
+                  <a:pt x="1281466" y="2135777"/>
                 </a:lnTo>
               </a:path>
             </a:pathLst>
@@ -12449,8 +12449,8 @@
         </p:nvSpPr>
         <p:spPr>
           <a:xfrm>
-            <a:off x="9066093" y="2125980"/>
-            <a:ext cx="1316736" cy="2194560"/>
+            <a:off x="9066093" y="2155371"/>
+            <a:ext cx="1281466" cy="2135777"/>
           </a:xfrm>
           <a:custGeom>
             <a:avLst/>
@@ -12459,24 +12459,24 @@
             <a:cxnLst/>
             <a:rect l="l" t="t" r="r" b="b"/>
             <a:pathLst>
-              <a:path w="1316736" h="2194560">
+              <a:path w="1281466" h="2135777">
                 <a:moveTo>
                   <a:pt x="0" y="0"/>
                 </a:moveTo>
                 <a:lnTo>
-                  <a:pt x="877824" y="0"/>
-                </a:lnTo>
-                <a:lnTo>
-                  <a:pt x="438912" y="877824"/>
-                </a:lnTo>
-                <a:lnTo>
-                  <a:pt x="1316736" y="1755648"/>
-                </a:lnTo>
-                <a:lnTo>
-                  <a:pt x="438912" y="2194560"/>
-                </a:lnTo>
-                <a:lnTo>
-                  <a:pt x="0" y="2194560"/>
+                  <a:pt x="854311" y="0"/>
+                </a:lnTo>
+                <a:lnTo>
+                  <a:pt x="427155" y="854311"/>
+                </a:lnTo>
+                <a:lnTo>
+                  <a:pt x="1281466" y="1708622"/>
+                </a:lnTo>
+                <a:lnTo>
+                  <a:pt x="427155" y="2135777"/>
+                </a:lnTo>
+                <a:lnTo>
+                  <a:pt x="0" y="2135777"/>
                 </a:lnTo>
               </a:path>
             </a:pathLst>
@@ -12498,8 +12498,8 @@
         </p:nvSpPr>
         <p:spPr>
           <a:xfrm flipV="1">
-            <a:off x="9066093" y="1687068"/>
-            <a:ext cx="0" cy="3072384"/>
+            <a:off x="9066093" y="1728216"/>
+            <a:ext cx="0" cy="2990088"/>
           </a:xfrm>
           <a:prstGeom prst="line">
             <a:avLst/>
@@ -12521,8 +12521,8 @@
         </p:nvSpPr>
         <p:spPr>
           <a:xfrm>
-            <a:off x="7749357" y="3881628"/>
-            <a:ext cx="1316736" cy="0"/>
+            <a:off x="7784627" y="3863993"/>
+            <a:ext cx="1281466" cy="0"/>
           </a:xfrm>
           <a:prstGeom prst="line">
             <a:avLst/>
@@ -12544,8 +12544,8 @@
         </p:nvSpPr>
         <p:spPr>
           <a:xfrm>
-            <a:off x="9066093" y="3881628"/>
-            <a:ext cx="1316736" cy="0"/>
+            <a:off x="9066093" y="3863993"/>
+            <a:ext cx="1281466" cy="0"/>
           </a:xfrm>
           <a:prstGeom prst="line">
             <a:avLst/>
@@ -12567,7 +12567,7 @@
         </p:nvSpPr>
         <p:spPr>
           <a:xfrm>
-            <a:off x="8123753" y="3455543"/>
+            <a:off x="8141388" y="3437908"/>
             <a:ext cx="567944" cy="349250"/>
           </a:xfrm>
           <a:prstGeom prst="rect">
@@ -12606,7 +12606,7 @@
         </p:nvSpPr>
         <p:spPr>
           <a:xfrm>
-            <a:off x="9440489" y="3455543"/>
+            <a:off x="9422854" y="3437908"/>
             <a:ext cx="567944" cy="349250"/>
           </a:xfrm>
           <a:prstGeom prst="rect">
@@ -12645,7 +12645,7 @@
         </p:nvSpPr>
         <p:spPr>
           <a:xfrm>
-            <a:off x="7689921" y="3822192"/>
+            <a:off x="7725191" y="3804557"/>
             <a:ext cx="118872" cy="118872"/>
           </a:xfrm>
           <a:prstGeom prst="ellipse">
@@ -12670,7 +12670,7 @@
         </p:nvSpPr>
         <p:spPr>
           <a:xfrm>
-            <a:off x="10323393" y="3822192"/>
+            <a:off x="10288123" y="3804557"/>
             <a:ext cx="118872" cy="118872"/>
           </a:xfrm>
           <a:prstGeom prst="ellipse">
@@ -12695,7 +12695,7 @@
         </p:nvSpPr>
         <p:spPr>
           <a:xfrm>
-            <a:off x="7284283" y="3643503"/>
+            <a:off x="7252497" y="3625868"/>
             <a:ext cx="483108" cy="476250"/>
           </a:xfrm>
           <a:prstGeom prst="rect">
@@ -14468,7 +14468,7 @@
         </p:nvSpPr>
         <p:spPr>
           <a:xfrm>
-            <a:off x="3146617" y="3691828"/>
+            <a:off x="3194032" y="3739243"/>
             <a:ext cx="483108" cy="476250"/>
           </a:xfrm>
           <a:prstGeom prst="rect">
@@ -15495,7 +15495,7 @@
         </p:nvSpPr>
         <p:spPr>
           <a:xfrm>
-            <a:off x="7268471" y="1730988"/>
+            <a:off x="7221055" y="1683572"/>
             <a:ext cx="483108" cy="476250"/>
           </a:xfrm>
           <a:prstGeom prst="rect">
@@ -15534,7 +15534,7 @@
         </p:nvSpPr>
         <p:spPr>
           <a:xfrm>
-            <a:off x="8982592" y="2662998"/>
+            <a:off x="9030007" y="2615583"/>
             <a:ext cx="483108" cy="476250"/>
           </a:xfrm>
           <a:prstGeom prst="rect">
